--- a/module-05-dijkstra/slides/03-dijkstras-algorithm-the-concept.pptx
+++ b/module-05-dijkstra/slides/03-dijkstras-algorithm-the-concept.pptx
@@ -3172,7 +3172,7 @@
               </a:defRPr>
             </a:pPr>
             <a:r>
-              <a:t>Module 5: Dijkstra's Algorithm</a:t>
+              <a:t>Module 5: Dijkstra</a:t>
             </a:r>
           </a:p>
         </p:txBody>
@@ -3665,7 +3665,7 @@
               <a:spcAft>
                 <a:spcPts val="100"/>
               </a:spcAft>
-              <a:defRPr sz="1300">
+              <a:defRPr sz="1800">
                 <a:solidFill>
                   <a:srgbClr val="333333"/>
                 </a:solidFill>
@@ -3681,7 +3681,7 @@
               <a:spcAft>
                 <a:spcPts val="100"/>
               </a:spcAft>
-              <a:defRPr sz="1300">
+              <a:defRPr sz="1800">
                 <a:solidFill>
                   <a:srgbClr val="333333"/>
                 </a:solidFill>
@@ -3697,7 +3697,7 @@
               <a:spcAft>
                 <a:spcPts val="100"/>
               </a:spcAft>
-              <a:defRPr sz="1300">
+              <a:defRPr sz="1800">
                 <a:solidFill>
                   <a:srgbClr val="333333"/>
                 </a:solidFill>
@@ -3713,7 +3713,7 @@
               <a:spcAft>
                 <a:spcPts val="100"/>
               </a:spcAft>
-              <a:defRPr sz="1300">
+              <a:defRPr sz="1800">
                 <a:solidFill>
                   <a:srgbClr val="333333"/>
                 </a:solidFill>
@@ -3729,7 +3729,7 @@
               <a:spcAft>
                 <a:spcPts val="100"/>
               </a:spcAft>
-              <a:defRPr sz="1300">
+              <a:defRPr sz="1800">
                 <a:solidFill>
                   <a:srgbClr val="333333"/>
                 </a:solidFill>
@@ -4114,7 +4114,7 @@
               </a:defRPr>
             </a:pPr>
             <a:r>
-              <a:t>Implement Dijkstra's algorithm as a Python class</a:t>
+              <a:t>Implement Dijkstra's algorithm as Python functions</a:t>
             </a:r>
           </a:p>
           <a:p>
@@ -4130,7 +4130,7 @@
               </a:defRPr>
             </a:pPr>
             <a:r>
-              <a:t>Write compute_path(destination) that returns a list of tuples</a:t>
+              <a:t>Design compute_dijkstra_path(position, destination, graph) to return a list of tuples</a:t>
             </a:r>
           </a:p>
           <a:p>
@@ -4146,7 +4146,7 @@
               </a:defRPr>
             </a:pPr>
             <a:r>
-              <a:t>Same interface as Manhattan — so Navigator works with both!</a:t>
+              <a:t>Same return shape as compute_manhattan_path() — so drive_path() works with both!</a:t>
             </a:r>
           </a:p>
           <a:p>
@@ -4738,7 +4738,7 @@
                         </a:defRPr>
                       </a:pPr>
                       <a:r>
-                        <a:t>distances</a:t>
+                        <a:t>`distances`</a:t>
                       </a:r>
                     </a:p>
                   </a:txBody>
@@ -4791,7 +4791,7 @@
                         </a:defRPr>
                       </a:pPr>
                       <a:r>
-                        <a:t>previous</a:t>
+                        <a:t>`previous`</a:t>
                       </a:r>
                     </a:p>
                   </a:txBody>
@@ -4856,7 +4856,7 @@
                         </a:defRPr>
                       </a:pPr>
                       <a:r>
-                        <a:t>visited</a:t>
+                        <a:t>`visited`</a:t>
                       </a:r>
                     </a:p>
                   </a:txBody>
@@ -5011,7 +5011,7 @@
               <a:spcAft>
                 <a:spcPts val="100"/>
               </a:spcAft>
-              <a:defRPr sz="1300">
+              <a:defRPr sz="1800">
                 <a:solidFill>
                   <a:srgbClr val="333333"/>
                 </a:solidFill>
@@ -5027,7 +5027,7 @@
               <a:spcAft>
                 <a:spcPts val="100"/>
               </a:spcAft>
-              <a:defRPr sz="1300">
+              <a:defRPr sz="1800">
                 <a:solidFill>
                   <a:srgbClr val="333333"/>
                 </a:solidFill>
@@ -5043,7 +5043,7 @@
               <a:spcAft>
                 <a:spcPts val="100"/>
               </a:spcAft>
-              <a:defRPr sz="1300">
+              <a:defRPr sz="1800">
                 <a:solidFill>
                   <a:srgbClr val="333333"/>
                 </a:solidFill>
@@ -5698,7 +5698,7 @@
               <a:spcAft>
                 <a:spcPts val="100"/>
               </a:spcAft>
-              <a:defRPr sz="1300">
+              <a:defRPr sz="1800">
                 <a:solidFill>
                   <a:srgbClr val="333333"/>
                 </a:solidFill>
@@ -5714,7 +5714,7 @@
               <a:spcAft>
                 <a:spcPts val="100"/>
               </a:spcAft>
-              <a:defRPr sz="1300">
+              <a:defRPr sz="1800">
                 <a:solidFill>
                   <a:srgbClr val="333333"/>
                 </a:solidFill>
@@ -5730,7 +5730,7 @@
               <a:spcAft>
                 <a:spcPts val="100"/>
               </a:spcAft>
-              <a:defRPr sz="1300">
+              <a:defRPr sz="1800">
                 <a:solidFill>
                   <a:srgbClr val="333333"/>
                 </a:solidFill>
@@ -5746,7 +5746,7 @@
               <a:spcAft>
                 <a:spcPts val="100"/>
               </a:spcAft>
-              <a:defRPr sz="1300">
+              <a:defRPr sz="1800">
                 <a:solidFill>
                   <a:srgbClr val="333333"/>
                 </a:solidFill>
@@ -5762,7 +5762,7 @@
               <a:spcAft>
                 <a:spcPts val="100"/>
               </a:spcAft>
-              <a:defRPr sz="1300">
+              <a:defRPr sz="1800">
                 <a:solidFill>
                   <a:srgbClr val="333333"/>
                 </a:solidFill>
@@ -5846,7 +5846,7 @@
               <a:spcAft>
                 <a:spcPts val="100"/>
               </a:spcAft>
-              <a:defRPr sz="1300">
+              <a:defRPr sz="1800">
                 <a:solidFill>
                   <a:srgbClr val="333333"/>
                 </a:solidFill>
@@ -5862,7 +5862,7 @@
               <a:spcAft>
                 <a:spcPts val="100"/>
               </a:spcAft>
-              <a:defRPr sz="1300">
+              <a:defRPr sz="1800">
                 <a:solidFill>
                   <a:srgbClr val="333333"/>
                 </a:solidFill>
@@ -5878,7 +5878,7 @@
               <a:spcAft>
                 <a:spcPts val="100"/>
               </a:spcAft>
-              <a:defRPr sz="1300">
+              <a:defRPr sz="1800">
                 <a:solidFill>
                   <a:srgbClr val="333333"/>
                 </a:solidFill>
@@ -5894,7 +5894,7 @@
               <a:spcAft>
                 <a:spcPts val="100"/>
               </a:spcAft>
-              <a:defRPr sz="1300">
+              <a:defRPr sz="1800">
                 <a:solidFill>
                   <a:srgbClr val="333333"/>
                 </a:solidFill>
@@ -5910,7 +5910,7 @@
               <a:spcAft>
                 <a:spcPts val="100"/>
               </a:spcAft>
-              <a:defRPr sz="1300">
+              <a:defRPr sz="1800">
                 <a:solidFill>
                   <a:srgbClr val="333333"/>
                 </a:solidFill>
@@ -5926,7 +5926,7 @@
               <a:spcAft>
                 <a:spcPts val="100"/>
               </a:spcAft>
-              <a:defRPr sz="1300">
+              <a:defRPr sz="1800">
                 <a:solidFill>
                   <a:srgbClr val="333333"/>
                 </a:solidFill>
@@ -5942,7 +5942,7 @@
               <a:spcAft>
                 <a:spcPts val="100"/>
               </a:spcAft>
-              <a:defRPr sz="1300">
+              <a:defRPr sz="1800">
                 <a:solidFill>
                   <a:srgbClr val="333333"/>
                 </a:solidFill>
@@ -5958,7 +5958,7 @@
               <a:spcAft>
                 <a:spcPts val="100"/>
               </a:spcAft>
-              <a:defRPr sz="1300">
+              <a:defRPr sz="1800">
                 <a:solidFill>
                   <a:srgbClr val="333333"/>
                 </a:solidFill>
@@ -5974,7 +5974,7 @@
               <a:spcAft>
                 <a:spcPts val="100"/>
               </a:spcAft>
-              <a:defRPr sz="1300">
+              <a:defRPr sz="1800">
                 <a:solidFill>
                   <a:srgbClr val="333333"/>
                 </a:solidFill>
@@ -5990,7 +5990,7 @@
               <a:spcAft>
                 <a:spcPts val="100"/>
               </a:spcAft>
-              <a:defRPr sz="1300">
+              <a:defRPr sz="1800">
                 <a:solidFill>
                   <a:srgbClr val="333333"/>
                 </a:solidFill>
@@ -6012,7 +6012,7 @@
         <p:spPr>
           <a:xfrm>
             <a:off x="548640" y="5166360"/>
-            <a:ext cx="10972800" cy="960120"/>
+            <a:ext cx="10972800" cy="320040"/>
           </a:xfrm>
           <a:prstGeom prst="roundRect">
             <a:avLst/>
@@ -6057,7 +6057,7 @@
         <p:spPr>
           <a:xfrm>
             <a:off x="731520" y="5257800"/>
-            <a:ext cx="10607040" cy="777240"/>
+            <a:ext cx="10607040" cy="137160"/>
           </a:xfrm>
           <a:prstGeom prst="rect">
             <a:avLst/>
@@ -6074,7 +6074,7 @@
               <a:spcAft>
                 <a:spcPts val="100"/>
               </a:spcAft>
-              <a:defRPr sz="1300">
+              <a:defRPr sz="1800">
                 <a:solidFill>
                   <a:srgbClr val="333333"/>
                 </a:solidFill>
@@ -6090,7 +6090,7 @@
               <a:spcAft>
                 <a:spcPts val="100"/>
               </a:spcAft>
-              <a:defRPr sz="1300">
+              <a:defRPr sz="1800">
                 <a:solidFill>
                   <a:srgbClr val="333333"/>
                 </a:solidFill>
@@ -6106,7 +6106,7 @@
               <a:spcAft>
                 <a:spcPts val="100"/>
               </a:spcAft>
-              <a:defRPr sz="1300">
+              <a:defRPr sz="1800">
                 <a:solidFill>
                   <a:srgbClr val="333333"/>
                 </a:solidFill>
@@ -6119,30 +6119,6 @@
           </a:p>
         </p:txBody>
       </p:sp>
-      <p:pic>
-        <p:nvPicPr>
-          <p:cNvPr id="14" name="Picture 13" descr="dijkstra-step0-setup.png"/>
-          <p:cNvPicPr>
-            <a:picLocks noChangeAspect="1"/>
-          </p:cNvPicPr>
-          <p:nvPr/>
-        </p:nvPicPr>
-        <p:blipFill>
-          <a:blip r:embed="rId2"/>
-          <a:stretch>
-            <a:fillRect/>
-          </a:stretch>
-        </p:blipFill>
-        <p:spPr>
-          <a:xfrm>
-            <a:off x="1371600" y="1371600"/>
-            <a:ext cx="4572000" cy="3096591"/>
-          </a:xfrm>
-          <a:prstGeom prst="rect">
-            <a:avLst/>
-          </a:prstGeom>
-        </p:spPr>
-      </p:pic>
     </p:spTree>
   </p:cSld>
   <p:clrMapOvr>
@@ -6364,7 +6340,7 @@
         </p:nvSpPr>
         <p:spPr>
           <a:xfrm>
-            <a:off x="548640" y="1371600"/>
+            <a:off x="548640" y="2377440"/>
             <a:ext cx="10972800" cy="960120"/>
           </a:xfrm>
           <a:prstGeom prst="roundRect">
@@ -6409,7 +6385,7 @@
         </p:nvSpPr>
         <p:spPr>
           <a:xfrm>
-            <a:off x="731520" y="1463040"/>
+            <a:off x="731520" y="2468880"/>
             <a:ext cx="10607040" cy="777240"/>
           </a:xfrm>
           <a:prstGeom prst="rect">
@@ -6427,7 +6403,7 @@
               <a:spcAft>
                 <a:spcPts val="100"/>
               </a:spcAft>
-              <a:defRPr sz="1300">
+              <a:defRPr sz="1800">
                 <a:solidFill>
                   <a:srgbClr val="333333"/>
                 </a:solidFill>
@@ -6443,7 +6419,7 @@
               <a:spcAft>
                 <a:spcPts val="100"/>
               </a:spcAft>
-              <a:defRPr sz="1300">
+              <a:defRPr sz="1800">
                 <a:solidFill>
                   <a:srgbClr val="333333"/>
                 </a:solidFill>
@@ -6459,7 +6435,7 @@
               <a:spcAft>
                 <a:spcPts val="100"/>
               </a:spcAft>
-              <a:defRPr sz="1300">
+              <a:defRPr sz="1800">
                 <a:solidFill>
                   <a:srgbClr val="333333"/>
                 </a:solidFill>
@@ -6480,7 +6456,7 @@
         </p:nvSpPr>
         <p:spPr>
           <a:xfrm>
-            <a:off x="548640" y="2468880"/>
+            <a:off x="548640" y="3474720"/>
             <a:ext cx="10972800" cy="365760"/>
           </a:xfrm>
           <a:prstGeom prst="rect">
@@ -6580,7 +6556,7 @@
         </p:nvSpPr>
         <p:spPr>
           <a:xfrm>
-            <a:off x="548640" y="2468880"/>
+            <a:off x="548640" y="4297680"/>
             <a:ext cx="10972800" cy="731520"/>
           </a:xfrm>
           <a:prstGeom prst="roundRect">
@@ -6625,7 +6601,7 @@
         </p:nvSpPr>
         <p:spPr>
           <a:xfrm>
-            <a:off x="731520" y="2560320"/>
+            <a:off x="731520" y="4389120"/>
             <a:ext cx="10607040" cy="548640"/>
           </a:xfrm>
           <a:prstGeom prst="rect">
@@ -6643,7 +6619,7 @@
               <a:spcAft>
                 <a:spcPts val="100"/>
               </a:spcAft>
-              <a:defRPr sz="1300">
+              <a:defRPr sz="1800">
                 <a:solidFill>
                   <a:srgbClr val="333333"/>
                 </a:solidFill>
@@ -6659,7 +6635,7 @@
               <a:spcAft>
                 <a:spcPts val="100"/>
               </a:spcAft>
-              <a:defRPr sz="1300">
+              <a:defRPr sz="1800">
                 <a:solidFill>
                   <a:srgbClr val="333333"/>
                 </a:solidFill>
@@ -6680,7 +6656,7 @@
         </p:nvSpPr>
         <p:spPr>
           <a:xfrm>
-            <a:off x="548640" y="3337560"/>
+            <a:off x="548640" y="5166360"/>
             <a:ext cx="10972800" cy="365760"/>
           </a:xfrm>
           <a:prstGeom prst="rect">
@@ -6725,177 +6701,8 @@
               <a:t>Neighbors: (0,0) already visited, (2,0) unseen</a:t>
             </a:r>
           </a:p>
-          <a:p>
-            <a:pPr>
-              <a:spcAft>
-                <a:spcPts val="400"/>
-              </a:spcAft>
-              <a:defRPr sz="1700" b="0">
-                <a:solidFill>
-                  <a:srgbClr val="000000"/>
-                </a:solidFill>
-                <a:latin typeface="Calibri"/>
-              </a:defRPr>
-            </a:pPr>
-            <a:r>
-              <a:t>(2,0): distance = 1 + 1 = 2, previous = (1,0)</a:t>
-            </a:r>
-          </a:p>
-          <a:p>
-            <a:pPr>
-              <a:spcAft>
-                <a:spcPts val="400"/>
-              </a:spcAft>
-              <a:defRPr sz="1700" b="0">
-                <a:solidFill>
-                  <a:srgbClr val="000000"/>
-                </a:solidFill>
-                <a:latin typeface="Calibri"/>
-              </a:defRPr>
-            </a:pPr>
-            <a:r>
-              <a:t>Mark (1,0) visited</a:t>
-            </a:r>
-          </a:p>
-          <a:p>
-            <a:pPr>
-              <a:spcAft>
-                <a:spcPts val="400"/>
-              </a:spcAft>
-              <a:defRPr sz="400" b="0">
-                <a:solidFill>
-                  <a:srgbClr val="000000"/>
-                </a:solidFill>
-                <a:latin typeface="Calibri"/>
-              </a:defRPr>
-            </a:pPr>
-          </a:p>
-        </p:txBody>
-      </p:sp>
-      <p:sp>
-        <p:nvSpPr>
-          <p:cNvPr id="11" name="Rounded Rectangle 10"/>
-          <p:cNvSpPr/>
-          <p:nvPr/>
-        </p:nvSpPr>
-        <p:spPr>
-          <a:xfrm>
-            <a:off x="548640" y="3337560"/>
-            <a:ext cx="10972800" cy="731520"/>
-          </a:xfrm>
-          <a:prstGeom prst="roundRect">
-            <a:avLst/>
-          </a:prstGeom>
-          <a:solidFill>
-            <a:srgbClr val="F0F0F0"/>
-          </a:solidFill>
-          <a:ln w="12700">
-            <a:solidFill>
-              <a:srgbClr val="999999"/>
-            </a:solidFill>
-          </a:ln>
-        </p:spPr>
-        <p:style>
-          <a:lnRef idx="1">
-            <a:schemeClr val="accent1"/>
-          </a:lnRef>
-          <a:fillRef idx="3">
-            <a:schemeClr val="accent1"/>
-          </a:fillRef>
-          <a:effectRef idx="2">
-            <a:schemeClr val="accent1"/>
-          </a:effectRef>
-          <a:fontRef idx="minor">
-            <a:schemeClr val="lt1"/>
-          </a:fontRef>
-        </p:style>
-        <p:txBody>
-          <a:bodyPr rtlCol="0" anchor="ctr"/>
-          <a:lstStyle/>
-          <a:p>
-            <a:pPr algn="ctr"/>
-          </a:p>
-        </p:txBody>
-      </p:sp>
-      <p:sp>
-        <p:nvSpPr>
-          <p:cNvPr id="12" name="TextBox 11"/>
-          <p:cNvSpPr txBox="1"/>
-          <p:nvPr/>
-        </p:nvSpPr>
-        <p:spPr>
-          <a:xfrm>
-            <a:off x="731520" y="3429000"/>
-            <a:ext cx="10607040" cy="548640"/>
-          </a:xfrm>
-          <a:prstGeom prst="rect">
-            <a:avLst/>
-          </a:prstGeom>
-          <a:noFill/>
-        </p:spPr>
-        <p:txBody>
-          <a:bodyPr wrap="square">
-            <a:spAutoFit/>
-          </a:bodyPr>
-          <a:lstStyle/>
-          <a:p>
-            <a:pPr>
-              <a:spcAft>
-                <a:spcPts val="100"/>
-              </a:spcAft>
-              <a:defRPr sz="1300">
-                <a:solidFill>
-                  <a:srgbClr val="333333"/>
-                </a:solidFill>
-                <a:latin typeface="Courier New"/>
-              </a:defRPr>
-            </a:pPr>
-            <a:r>
-              <a:t>distances: {..., (0,2): 2, (2,0): 2}</a:t>
-            </a:r>
-          </a:p>
-          <a:p>
-            <a:pPr>
-              <a:spcAft>
-                <a:spcPts val="100"/>
-              </a:spcAft>
-              <a:defRPr sz="1300">
-                <a:solidFill>
-                  <a:srgbClr val="333333"/>
-                </a:solidFill>
-                <a:latin typeface="Courier New"/>
-              </a:defRPr>
-            </a:pPr>
-            <a:r>
-              <a:t>visited:   [(0,0), (0,1), (1,0)]</a:t>
-            </a:r>
-          </a:p>
-        </p:txBody>
-      </p:sp>
-      <p:pic>
-        <p:nvPicPr>
-          <p:cNvPr id="13" name="Picture 12" descr="dijkstra-step1.png"/>
-          <p:cNvPicPr>
-            <a:picLocks noChangeAspect="1"/>
-          </p:cNvPicPr>
-          <p:nvPr/>
-        </p:nvPicPr>
-        <p:blipFill>
-          <a:blip r:embed="rId2"/>
-          <a:stretch>
-            <a:fillRect/>
-          </a:stretch>
-        </p:blipFill>
-        <p:spPr>
-          <a:xfrm>
-            <a:off x="1371600" y="1371600"/>
-            <a:ext cx="4572000" cy="3096591"/>
-          </a:xfrm>
-          <a:prstGeom prst="rect">
-            <a:avLst/>
-          </a:prstGeom>
-        </p:spPr>
-      </p:pic>
+        </p:txBody>
+      </p:sp>
     </p:spTree>
   </p:cSld>
   <p:clrMapOvr>
@@ -7246,7 +7053,7 @@
         <p:spPr>
           <a:xfrm>
             <a:off x="548640" y="5212080"/>
-            <a:ext cx="5669280" cy="960120"/>
+            <a:ext cx="5669280" cy="731520"/>
           </a:xfrm>
           <a:prstGeom prst="roundRect">
             <a:avLst/>
@@ -7291,7 +7098,7 @@
         <p:spPr>
           <a:xfrm>
             <a:off x="731520" y="5303520"/>
-            <a:ext cx="5303520" cy="777240"/>
+            <a:ext cx="5303520" cy="548640"/>
           </a:xfrm>
           <a:prstGeom prst="rect">
             <a:avLst/>
@@ -7308,7 +7115,7 @@
               <a:spcAft>
                 <a:spcPts val="100"/>
               </a:spcAft>
-              <a:defRPr sz="1300">
+              <a:defRPr sz="1800">
                 <a:solidFill>
                   <a:srgbClr val="333333"/>
                 </a:solidFill>
@@ -7324,7 +7131,7 @@
               <a:spcAft>
                 <a:spcPts val="100"/>
               </a:spcAft>
-              <a:defRPr sz="1300">
+              <a:defRPr sz="1800">
                 <a:solidFill>
                   <a:srgbClr val="333333"/>
                 </a:solidFill>
@@ -7340,7 +7147,7 @@
               <a:spcAft>
                 <a:spcPts val="100"/>
               </a:spcAft>
-              <a:defRPr sz="1300">
+              <a:defRPr sz="1800">
                 <a:solidFill>
                   <a:srgbClr val="333333"/>
                 </a:solidFill>
@@ -7362,7 +7169,7 @@
         <p:spPr>
           <a:xfrm>
             <a:off x="6583680" y="5212080"/>
-            <a:ext cx="5029200" cy="960120"/>
+            <a:ext cx="5029200" cy="731520"/>
           </a:xfrm>
           <a:prstGeom prst="rect">
             <a:avLst/>
@@ -7377,30 +7184,6 @@
           <a:p/>
         </p:txBody>
       </p:sp>
-      <p:pic>
-        <p:nvPicPr>
-          <p:cNvPr id="8" name="Picture 7" descr="dijkstra-final.png"/>
-          <p:cNvPicPr>
-            <a:picLocks noChangeAspect="1"/>
-          </p:cNvPicPr>
-          <p:nvPr/>
-        </p:nvPicPr>
-        <p:blipFill>
-          <a:blip r:embed="rId2"/>
-          <a:stretch>
-            <a:fillRect/>
-          </a:stretch>
-        </p:blipFill>
-        <p:spPr>
-          <a:xfrm>
-            <a:off x="1371600" y="1371600"/>
-            <a:ext cx="4572000" cy="3096591"/>
-          </a:xfrm>
-          <a:prstGeom prst="rect">
-            <a:avLst/>
-          </a:prstGeom>
-        </p:spPr>
-      </p:pic>
     </p:spTree>
   </p:cSld>
   <p:clrMapOvr>
@@ -7558,7 +7341,7 @@
         </p:nvSpPr>
         <p:spPr>
           <a:xfrm>
-            <a:off x="548640" y="1371600"/>
+            <a:off x="548640" y="1645920"/>
             <a:ext cx="10972800" cy="2560320"/>
           </a:xfrm>
           <a:prstGeom prst="roundRect">
@@ -7603,7 +7386,7 @@
         </p:nvSpPr>
         <p:spPr>
           <a:xfrm>
-            <a:off x="731520" y="1463040"/>
+            <a:off x="731520" y="1737360"/>
             <a:ext cx="10607040" cy="2377440"/>
           </a:xfrm>
           <a:prstGeom prst="rect">
@@ -7621,7 +7404,7 @@
               <a:spcAft>
                 <a:spcPts val="100"/>
               </a:spcAft>
-              <a:defRPr sz="1300">
+              <a:defRPr sz="1800">
                 <a:solidFill>
                   <a:srgbClr val="333333"/>
                 </a:solidFill>
@@ -7637,7 +7420,7 @@
               <a:spcAft>
                 <a:spcPts val="100"/>
               </a:spcAft>
-              <a:defRPr sz="1300">
+              <a:defRPr sz="1800">
                 <a:solidFill>
                   <a:srgbClr val="333333"/>
                 </a:solidFill>
@@ -7653,7 +7436,7 @@
               <a:spcAft>
                 <a:spcPts val="100"/>
               </a:spcAft>
-              <a:defRPr sz="1300">
+              <a:defRPr sz="1800">
                 <a:solidFill>
                   <a:srgbClr val="333333"/>
                 </a:solidFill>
@@ -7669,7 +7452,7 @@
               <a:spcAft>
                 <a:spcPts val="100"/>
               </a:spcAft>
-              <a:defRPr sz="1300">
+              <a:defRPr sz="1800">
                 <a:solidFill>
                   <a:srgbClr val="333333"/>
                 </a:solidFill>
@@ -7685,7 +7468,7 @@
               <a:spcAft>
                 <a:spcPts val="100"/>
               </a:spcAft>
-              <a:defRPr sz="1300">
+              <a:defRPr sz="1800">
                 <a:solidFill>
                   <a:srgbClr val="333333"/>
                 </a:solidFill>
@@ -7701,7 +7484,7 @@
               <a:spcAft>
                 <a:spcPts val="100"/>
               </a:spcAft>
-              <a:defRPr sz="1300">
+              <a:defRPr sz="1800">
                 <a:solidFill>
                   <a:srgbClr val="333333"/>
                 </a:solidFill>
@@ -7717,7 +7500,7 @@
               <a:spcAft>
                 <a:spcPts val="100"/>
               </a:spcAft>
-              <a:defRPr sz="1300">
+              <a:defRPr sz="1800">
                 <a:solidFill>
                   <a:srgbClr val="333333"/>
                 </a:solidFill>
@@ -7733,7 +7516,7 @@
               <a:spcAft>
                 <a:spcPts val="100"/>
               </a:spcAft>
-              <a:defRPr sz="1300">
+              <a:defRPr sz="1800">
                 <a:solidFill>
                   <a:srgbClr val="333333"/>
                 </a:solidFill>
@@ -7749,7 +7532,7 @@
               <a:spcAft>
                 <a:spcPts val="100"/>
               </a:spcAft>
-              <a:defRPr sz="1300">
+              <a:defRPr sz="1800">
                 <a:solidFill>
                   <a:srgbClr val="333333"/>
                 </a:solidFill>
@@ -7765,7 +7548,7 @@
               <a:spcAft>
                 <a:spcPts val="100"/>
               </a:spcAft>
-              <a:defRPr sz="1300">
+              <a:defRPr sz="1800">
                 <a:solidFill>
                   <a:srgbClr val="333333"/>
                 </a:solidFill>
@@ -7786,7 +7569,7 @@
         </p:nvSpPr>
         <p:spPr>
           <a:xfrm>
-            <a:off x="548640" y="4069080"/>
+            <a:off x="548640" y="4343400"/>
             <a:ext cx="10972800" cy="365760"/>
           </a:xfrm>
           <a:prstGeom prst="rect">
@@ -7908,184 +7691,8 @@
               </a:defRPr>
             </a:pPr>
           </a:p>
-          <a:p>
-            <a:pPr>
-              <a:spcAft>
-                <a:spcPts val="400"/>
-              </a:spcAft>
-              <a:defRPr sz="2000" b="1">
-                <a:solidFill>
-                  <a:srgbClr val="1B3A5C"/>
-                </a:solidFill>
-                <a:latin typeface="Calibri"/>
-              </a:defRPr>
-            </a:pPr>
-            <a:r>
-              <a:t>Reverse it to get the path:</a:t>
-            </a:r>
-          </a:p>
-        </p:txBody>
-      </p:sp>
-      <p:sp>
-        <p:nvSpPr>
-          <p:cNvPr id="8" name="Rounded Rectangle 7"/>
-          <p:cNvSpPr/>
-          <p:nvPr/>
-        </p:nvSpPr>
-        <p:spPr>
-          <a:xfrm>
-            <a:off x="548640" y="4069080"/>
-            <a:ext cx="10972800" cy="731520"/>
-          </a:xfrm>
-          <a:prstGeom prst="roundRect">
-            <a:avLst/>
-          </a:prstGeom>
-          <a:solidFill>
-            <a:srgbClr val="F0F0F0"/>
-          </a:solidFill>
-          <a:ln w="12700">
-            <a:solidFill>
-              <a:srgbClr val="999999"/>
-            </a:solidFill>
-          </a:ln>
-        </p:spPr>
-        <p:style>
-          <a:lnRef idx="1">
-            <a:schemeClr val="accent1"/>
-          </a:lnRef>
-          <a:fillRef idx="3">
-            <a:schemeClr val="accent1"/>
-          </a:fillRef>
-          <a:effectRef idx="2">
-            <a:schemeClr val="accent1"/>
-          </a:effectRef>
-          <a:fontRef idx="minor">
-            <a:schemeClr val="lt1"/>
-          </a:fontRef>
-        </p:style>
-        <p:txBody>
-          <a:bodyPr rtlCol="0" anchor="ctr"/>
-          <a:lstStyle/>
-          <a:p>
-            <a:pPr algn="ctr"/>
-          </a:p>
-        </p:txBody>
-      </p:sp>
-      <p:sp>
-        <p:nvSpPr>
-          <p:cNvPr id="9" name="TextBox 8"/>
-          <p:cNvSpPr txBox="1"/>
-          <p:nvPr/>
-        </p:nvSpPr>
-        <p:spPr>
-          <a:xfrm>
-            <a:off x="731520" y="4160520"/>
-            <a:ext cx="10607040" cy="548640"/>
-          </a:xfrm>
-          <a:prstGeom prst="rect">
-            <a:avLst/>
-          </a:prstGeom>
-          <a:noFill/>
-        </p:spPr>
-        <p:txBody>
-          <a:bodyPr wrap="square">
-            <a:spAutoFit/>
-          </a:bodyPr>
-          <a:lstStyle/>
-          <a:p>
-            <a:pPr>
-              <a:spcAft>
-                <a:spcPts val="100"/>
-              </a:spcAft>
-              <a:defRPr sz="1300">
-                <a:solidFill>
-                  <a:srgbClr val="333333"/>
-                </a:solidFill>
-                <a:latin typeface="Courier New"/>
-              </a:defRPr>
-            </a:pPr>
-            <a:r>
-              <a:t>(0,0) → (0,1) → (0,2) → (1,2) → (2,2)</a:t>
-            </a:r>
-          </a:p>
-        </p:txBody>
-      </p:sp>
-      <p:sp>
-        <p:nvSpPr>
-          <p:cNvPr id="10" name="TextBox 9"/>
-          <p:cNvSpPr txBox="1"/>
-          <p:nvPr/>
-        </p:nvSpPr>
-        <p:spPr>
-          <a:xfrm>
-            <a:off x="548640" y="4937760"/>
-            <a:ext cx="10972800" cy="365760"/>
-          </a:xfrm>
-          <a:prstGeom prst="rect">
-            <a:avLst/>
-          </a:prstGeom>
-          <a:noFill/>
-        </p:spPr>
-        <p:txBody>
-          <a:bodyPr wrap="square">
-            <a:spAutoFit/>
-          </a:bodyPr>
-          <a:lstStyle/>
-          <a:p>
-            <a:pPr>
-              <a:spcAft>
-                <a:spcPts val="400"/>
-              </a:spcAft>
-              <a:defRPr sz="1700" b="0">
-                <a:solidFill>
-                  <a:srgbClr val="000000"/>
-                </a:solidFill>
-                <a:latin typeface="Calibri"/>
-              </a:defRPr>
-            </a:pPr>
-            <a:r>
-              <a:t>This is the shortest path around the blocked node (1,1)! Total: 4 steps.</a:t>
-            </a:r>
-          </a:p>
-          <a:p>
-            <a:pPr>
-              <a:spcAft>
-                <a:spcPts val="400"/>
-              </a:spcAft>
-              <a:defRPr sz="400" b="0">
-                <a:solidFill>
-                  <a:srgbClr val="000000"/>
-                </a:solidFill>
-                <a:latin typeface="Calibri"/>
-              </a:defRPr>
-            </a:pPr>
-          </a:p>
-        </p:txBody>
-      </p:sp>
-      <p:pic>
-        <p:nvPicPr>
-          <p:cNvPr id="11" name="Picture 10" descr="backpointer-path.png"/>
-          <p:cNvPicPr>
-            <a:picLocks noChangeAspect="1"/>
-          </p:cNvPicPr>
-          <p:nvPr/>
-        </p:nvPicPr>
-        <p:blipFill>
-          <a:blip r:embed="rId2"/>
-          <a:stretch>
-            <a:fillRect/>
-          </a:stretch>
-        </p:blipFill>
-        <p:spPr>
-          <a:xfrm>
-            <a:off x="1828800" y="1371600"/>
-            <a:ext cx="4114800" cy="4055165"/>
-          </a:xfrm>
-          <a:prstGeom prst="rect">
-            <a:avLst/>
-          </a:prstGeom>
-        </p:spPr>
-      </p:pic>
+        </p:txBody>
+      </p:sp>
     </p:spTree>
   </p:cSld>
   <p:clrMapOvr>
@@ -8679,7 +8286,7 @@
                         </a:defRPr>
                       </a:pPr>
                       <a:r>
-                        <a:t>(0,0)→(1,0)→ STUCK at (1,1)!</a:t>
+                        <a:t>(0,0)→(1,0)→ **STUCK at (1,1)!**</a:t>
                       </a:r>
                     </a:p>
                   </a:txBody>
@@ -8859,7 +8466,7 @@
               </a:defRPr>
             </a:pPr>
             <a:r>
-              <a:t>Key design insight: Dijkstra's compute_path returns a list of tuples — the same format as Manhattan's compute_path. So our Navigator class doesn't need to change!</a:t>
+              <a:t>Key design insight: compute_dijkstra_path() returns a list of tuples — the same format as compute_manhattan_path(). So drive_path() doesn't need to change!</a:t>
             </a:r>
           </a:p>
           <a:p>
